--- a/modules/Factors/Factors.pptx
+++ b/modules/Factors/Factors.pptx
@@ -4413,6 +4413,13 @@
                 <a:latin typeface="Courier"/>
               </a:rPr>
               <a:t>, </a:t>
+            </a:r>
+            <a:br/>
+            <a:r>
+              <a:rPr>
+                <a:latin typeface="Courier"/>
+              </a:rPr>
+              <a:t>               </a:t>
             </a:r>
             <a:r>
               <a:rPr>
